--- a/doc/公文汇编助手-系统介绍.pptx
+++ b/doc/公文汇编助手-系统介绍.pptx
@@ -5152,7 +5152,7 @@
                 <a:ea typeface="Microsoft YaHei" pitchFamily="34" charset="-122"/>
                 <a:cs typeface="Microsoft YaHei" pitchFamily="34" charset="-120"/>
               </a:rPr>
-              <a:t>GWTOOL · 单机离线版 v1.18.0</a:t>
+              <a:t>GWTOOL · 单机离线版 v1.19.0</a:t>
             </a:r>
             <a:endParaRPr lang="en-US" sz="1300" dirty="0"/>
           </a:p>
@@ -37701,7 +37701,7 @@
                 <a:ea typeface="Microsoft YaHei" pitchFamily="34" charset="-122"/>
                 <a:cs typeface="Microsoft YaHei" pitchFamily="34" charset="-120"/>
               </a:rPr>
-              <a:t>pytest 全量 2898 用例 + 55 步端到端自检</a:t>
+              <a:t>pytest 全量 约 2900 用例 + 55 步端到端自检</a:t>
             </a:r>
             <a:endParaRPr lang="en-US" sz="1150" dirty="0"/>
           </a:p>
@@ -45078,7 +45078,7 @@
                 <a:ea typeface="Microsoft YaHei" pitchFamily="34" charset="-122"/>
                 <a:cs typeface="Microsoft YaHei" pitchFamily="34" charset="-120"/>
               </a:rPr>
-              <a:t>2898</a:t>
+              <a:t>2900</a:t>
             </a:r>
             <a:endParaRPr lang="en-US" sz="1500" dirty="0"/>
           </a:p>
@@ -47562,7 +47562,7 @@
                 <a:ea typeface="Microsoft YaHei" pitchFamily="34" charset="-122"/>
                 <a:cs typeface="Microsoft YaHei" pitchFamily="34" charset="-120"/>
               </a:rPr>
-              <a:t>公文汇编助手 · 单机离线版 v1.18.0</a:t>
+              <a:t>公文汇编助手 · 单机离线版 v1.19.0</a:t>
             </a:r>
             <a:endParaRPr lang="en-US" sz="1200" dirty="0"/>
           </a:p>

--- a/doc/公文汇编助手-系统介绍.pptx
+++ b/doc/公文汇编助手-系统介绍.pptx
@@ -5152,7 +5152,7 @@
                 <a:ea typeface="Microsoft YaHei" pitchFamily="34" charset="-122"/>
                 <a:cs typeface="Microsoft YaHei" pitchFamily="34" charset="-120"/>
               </a:rPr>
-              <a:t>GWTOOL · 单机离线版 v1.19.0</a:t>
+              <a:t>GWTOOL · 单机离线版 v1.21.0</a:t>
             </a:r>
             <a:endParaRPr lang="en-US" sz="1300" dirty="0"/>
           </a:p>
@@ -47562,7 +47562,7 @@
                 <a:ea typeface="Microsoft YaHei" pitchFamily="34" charset="-122"/>
                 <a:cs typeface="Microsoft YaHei" pitchFamily="34" charset="-120"/>
               </a:rPr>
-              <a:t>公文汇编助手 · 单机离线版 v1.19.0</a:t>
+              <a:t>公文汇编助手 · 单机离线版 v1.21.0</a:t>
             </a:r>
             <a:endParaRPr lang="en-US" sz="1200" dirty="0"/>
           </a:p>
